--- a/assets/big-feedback-picture.pptx
+++ b/assets/big-feedback-picture.pptx
@@ -259,7 +259,7 @@
           <a:p>
             <a:fld id="{F12CF0D0-C208-455E-A162-EDCE16C99048}" type="datetimeFigureOut">
               <a:rPr lang="de-DE" smtClean="0"/>
-              <a:t>14.11.2025</a:t>
+              <a:t>24.01.2026</a:t>
             </a:fld>
             <a:endParaRPr lang="de-DE"/>
           </a:p>
@@ -457,7 +457,7 @@
           <a:p>
             <a:fld id="{F12CF0D0-C208-455E-A162-EDCE16C99048}" type="datetimeFigureOut">
               <a:rPr lang="de-DE" smtClean="0"/>
-              <a:t>14.11.2025</a:t>
+              <a:t>24.01.2026</a:t>
             </a:fld>
             <a:endParaRPr lang="de-DE"/>
           </a:p>
@@ -665,7 +665,7 @@
           <a:p>
             <a:fld id="{F12CF0D0-C208-455E-A162-EDCE16C99048}" type="datetimeFigureOut">
               <a:rPr lang="de-DE" smtClean="0"/>
-              <a:t>14.11.2025</a:t>
+              <a:t>24.01.2026</a:t>
             </a:fld>
             <a:endParaRPr lang="de-DE"/>
           </a:p>
@@ -863,7 +863,7 @@
           <a:p>
             <a:fld id="{F12CF0D0-C208-455E-A162-EDCE16C99048}" type="datetimeFigureOut">
               <a:rPr lang="de-DE" smtClean="0"/>
-              <a:t>14.11.2025</a:t>
+              <a:t>24.01.2026</a:t>
             </a:fld>
             <a:endParaRPr lang="de-DE"/>
           </a:p>
@@ -1138,7 +1138,7 @@
           <a:p>
             <a:fld id="{F12CF0D0-C208-455E-A162-EDCE16C99048}" type="datetimeFigureOut">
               <a:rPr lang="de-DE" smtClean="0"/>
-              <a:t>14.11.2025</a:t>
+              <a:t>24.01.2026</a:t>
             </a:fld>
             <a:endParaRPr lang="de-DE"/>
           </a:p>
@@ -1403,7 +1403,7 @@
           <a:p>
             <a:fld id="{F12CF0D0-C208-455E-A162-EDCE16C99048}" type="datetimeFigureOut">
               <a:rPr lang="de-DE" smtClean="0"/>
-              <a:t>14.11.2025</a:t>
+              <a:t>24.01.2026</a:t>
             </a:fld>
             <a:endParaRPr lang="de-DE"/>
           </a:p>
@@ -1815,7 +1815,7 @@
           <a:p>
             <a:fld id="{F12CF0D0-C208-455E-A162-EDCE16C99048}" type="datetimeFigureOut">
               <a:rPr lang="de-DE" smtClean="0"/>
-              <a:t>14.11.2025</a:t>
+              <a:t>24.01.2026</a:t>
             </a:fld>
             <a:endParaRPr lang="de-DE"/>
           </a:p>
@@ -1956,7 +1956,7 @@
           <a:p>
             <a:fld id="{F12CF0D0-C208-455E-A162-EDCE16C99048}" type="datetimeFigureOut">
               <a:rPr lang="de-DE" smtClean="0"/>
-              <a:t>14.11.2025</a:t>
+              <a:t>24.01.2026</a:t>
             </a:fld>
             <a:endParaRPr lang="de-DE"/>
           </a:p>
@@ -2069,7 +2069,7 @@
           <a:p>
             <a:fld id="{F12CF0D0-C208-455E-A162-EDCE16C99048}" type="datetimeFigureOut">
               <a:rPr lang="de-DE" smtClean="0"/>
-              <a:t>14.11.2025</a:t>
+              <a:t>24.01.2026</a:t>
             </a:fld>
             <a:endParaRPr lang="de-DE"/>
           </a:p>
@@ -2380,7 +2380,7 @@
           <a:p>
             <a:fld id="{F12CF0D0-C208-455E-A162-EDCE16C99048}" type="datetimeFigureOut">
               <a:rPr lang="de-DE" smtClean="0"/>
-              <a:t>14.11.2025</a:t>
+              <a:t>24.01.2026</a:t>
             </a:fld>
             <a:endParaRPr lang="de-DE"/>
           </a:p>
@@ -2668,7 +2668,7 @@
           <a:p>
             <a:fld id="{F12CF0D0-C208-455E-A162-EDCE16C99048}" type="datetimeFigureOut">
               <a:rPr lang="de-DE" smtClean="0"/>
-              <a:t>14.11.2025</a:t>
+              <a:t>24.01.2026</a:t>
             </a:fld>
             <a:endParaRPr lang="de-DE"/>
           </a:p>
@@ -2909,7 +2909,7 @@
           <a:p>
             <a:fld id="{F12CF0D0-C208-455E-A162-EDCE16C99048}" type="datetimeFigureOut">
               <a:rPr lang="de-DE" smtClean="0"/>
-              <a:t>14.11.2025</a:t>
+              <a:t>24.01.2026</a:t>
             </a:fld>
             <a:endParaRPr lang="de-DE"/>
           </a:p>
@@ -3379,7 +3379,7 @@
                   <a:schemeClr val="tx1"/>
                 </a:solidFill>
               </a:rPr>
-              <a:t>CodingService</a:t>
+              <a:t>ResponseAnalyser</a:t>
             </a:r>
           </a:p>
         </p:txBody>
@@ -3902,14 +3902,12 @@
           </p:cNvPr>
           <p:cNvCxnSpPr>
             <a:cxnSpLocks/>
-            <a:stCxn id="6" idx="2"/>
-            <a:endCxn id="7" idx="0"/>
           </p:cNvCxnSpPr>
           <p:nvPr/>
         </p:nvCxnSpPr>
         <p:spPr>
           <a:xfrm>
-            <a:off x="3246969" y="1019534"/>
+            <a:off x="3409197" y="1019534"/>
             <a:ext cx="0" cy="933129"/>
           </a:xfrm>
           <a:prstGeom prst="straightConnector1">
@@ -3948,14 +3946,12 @@
           </p:cNvPr>
           <p:cNvCxnSpPr>
             <a:cxnSpLocks/>
-            <a:stCxn id="7" idx="2"/>
-            <a:endCxn id="8" idx="0"/>
           </p:cNvCxnSpPr>
           <p:nvPr/>
         </p:nvCxnSpPr>
         <p:spPr>
           <a:xfrm>
-            <a:off x="3246969" y="2327241"/>
+            <a:off x="3409197" y="2327241"/>
             <a:ext cx="0" cy="221983"/>
           </a:xfrm>
           <a:prstGeom prst="straightConnector1">
@@ -3999,7 +3995,7 @@
         </p:nvCxnSpPr>
         <p:spPr>
           <a:xfrm>
-            <a:off x="3246969" y="2923802"/>
+            <a:off x="3409197" y="2923802"/>
             <a:ext cx="1" cy="416727"/>
           </a:xfrm>
           <a:prstGeom prst="straightConnector1">
